--- a/assets/pptx/catalog-162.pptx
+++ b/assets/pptx/catalog-162.pptx
@@ -3273,7 +3273,7 @@
                 <a:ea typeface="Ebrima"/>
                 <a:cs typeface="Ebrima"/>
               </a:rPr>
-              <a:t>አምልኮ አውቅበታለሁ እንዲያውም አሳምራለሁ (2x)</a:t>
+              <a:t>አምልኮ አውቅበታለሁ እንዲያውም አሳምራለሁ 2x</a:t>
             </a:r>
           </a:p>
         </p:txBody>
@@ -3358,7 +3358,7 @@
                 <a:ea typeface="Ebrima"/>
                 <a:cs typeface="Ebrima"/>
               </a:rPr>
-              <a:t>አለማመስገን አለማምለክ ነው (2x)</a:t>
+              <a:t>አለማመስገን አለማምለክ ነው 2x</a:t>
             </a:r>
           </a:p>
         </p:txBody>
@@ -3425,7 +3425,7 @@
                 <a:ea typeface="Ebrima"/>
                 <a:cs typeface="Ebrima"/>
               </a:rPr>
-              <a:t>ጌታ (12x)</a:t>
+              <a:t>ጌታ 12x</a:t>
             </a:r>
           </a:p>
         </p:txBody>
@@ -3492,7 +3492,7 @@
                 <a:ea typeface="Ebrima"/>
                 <a:cs typeface="Ebrima"/>
               </a:rPr>
-              <a:t>ክብር ለአንተ እንጂ ለማን ይሰጣል (2x)</a:t>
+              <a:t>ክብር ለአንተ እንጂ ለማን ይሰጣል 2x</a:t>
             </a:r>
           </a:p>
           <a:p>
@@ -3510,7 +3510,7 @@
                 <a:ea typeface="Ebrima"/>
                 <a:cs typeface="Ebrima"/>
               </a:rPr>
-              <a:t>ክበር ለአንተ ነው እንጂ ለማን ይገባል (2x)</a:t>
+              <a:t>ክበር ለአንተ ነው እንጂ ለማን ይገባል 2x</a:t>
             </a:r>
           </a:p>
         </p:txBody>
@@ -3595,7 +3595,7 @@
                 <a:ea typeface="Ebrima"/>
                 <a:cs typeface="Ebrima"/>
               </a:rPr>
-              <a:t>ተነሳስቻለሁ ተነሳስቻለሁ (2x)</a:t>
+              <a:t>ተነሳስቻለሁ ተነሳስቻለሁ 2x</a:t>
             </a:r>
           </a:p>
         </p:txBody>
@@ -3662,7 +3662,7 @@
                 <a:ea typeface="Ebrima"/>
                 <a:cs typeface="Ebrima"/>
               </a:rPr>
-              <a:t>ክብር ለአንተ እንጂ ለማን ይሰጣል (2x)</a:t>
+              <a:t>ክብር ለአንተ እንጂ ለማን ይሰጣል 2x</a:t>
             </a:r>
           </a:p>
           <a:p>
@@ -3680,7 +3680,7 @@
                 <a:ea typeface="Ebrima"/>
                 <a:cs typeface="Ebrima"/>
               </a:rPr>
-              <a:t>ክበር ለአንተ ነው እንጂ ለማን ይገባል (2x)</a:t>
+              <a:t>ክበር ለአንተ ነው እንጂ ለማን ይገባል 2x</a:t>
             </a:r>
           </a:p>
         </p:txBody>
@@ -3747,7 +3747,7 @@
                 <a:ea typeface="Ebrima"/>
                 <a:cs typeface="Ebrima"/>
               </a:rPr>
-              <a:t>የአንተን ምሥጋና ለማንም አልሰዋም (2x)</a:t>
+              <a:t>የአንተን ምሥጋና ለማንም አልሰዋም 2x</a:t>
             </a:r>
           </a:p>
           <a:p>
@@ -3765,7 +3765,7 @@
                 <a:ea typeface="Ebrima"/>
                 <a:cs typeface="Ebrima"/>
               </a:rPr>
-              <a:t>የአንተን ክብር ለማንም አልስጠም (2x)</a:t>
+              <a:t>የአንተን ክብር ለማንም አልስጠም 2x</a:t>
             </a:r>
           </a:p>
         </p:txBody>
@@ -3832,7 +3832,7 @@
                 <a:ea typeface="Ebrima"/>
                 <a:cs typeface="Ebrima"/>
               </a:rPr>
-              <a:t>ጠዋት ሳልል ማታ አቀርባለሁ ምሥጋና (2x)</a:t>
+              <a:t>ጠዋት ሳልል ማታ አቀርባለሁ ምሥጋና 2x</a:t>
             </a:r>
           </a:p>
           <a:p>
@@ -3850,7 +3850,7 @@
                 <a:ea typeface="Ebrima"/>
                 <a:cs typeface="Ebrima"/>
               </a:rPr>
-              <a:t>ጠዋት ሳልል ማታ እሰዋለሁ ምሥጋና (2x)</a:t>
+              <a:t>ጠዋት ሳልል ማታ እሰዋለሁ ምሥጋና 2x</a:t>
             </a:r>
           </a:p>
         </p:txBody>
@@ -4056,7 +4056,7 @@
                 <a:ea typeface="Ebrima"/>
                 <a:cs typeface="Ebrima"/>
               </a:rPr>
-              <a:t>ንገሥ ብዬ ሳልጨርስ ይነጋብኛል ይነጋብኛል (2x)</a:t>
+              <a:t>ንገሥ ብዬ ሳልጨርስ ይነጋብኛል ይነጋብኛል 2x</a:t>
             </a:r>
           </a:p>
         </p:txBody>
@@ -4244,7 +4244,7 @@
                 <a:ea typeface="Ebrima"/>
                 <a:cs typeface="Ebrima"/>
               </a:rPr>
-              <a:t>ጌታ ተብሎ ምን ይቀጠላል (2x)</a:t>
+              <a:t>ጌታ ተብሎ ምን ይቀጠላል 2x</a:t>
             </a:r>
           </a:p>
           <a:p>
@@ -4262,7 +4262,7 @@
                 <a:ea typeface="Ebrima"/>
                 <a:cs typeface="Ebrima"/>
               </a:rPr>
-              <a:t>የምጋሥና ቃል ሁሉም አንሶሃል (2x)</a:t>
+              <a:t>የምጋሥና ቃል ሁሉም አንሶሃል 2x</a:t>
             </a:r>
           </a:p>
           <a:p>
@@ -4280,7 +4280,7 @@
                 <a:ea typeface="Ebrima"/>
                 <a:cs typeface="Ebrima"/>
               </a:rPr>
-              <a:t>አምላክ ተብሎ ምን ይቀጠላል (2x)</a:t>
+              <a:t>አምላክ ተብሎ ምን ይቀጠላል 2x</a:t>
             </a:r>
           </a:p>
           <a:p>
@@ -4298,7 +4298,7 @@
                 <a:ea typeface="Ebrima"/>
                 <a:cs typeface="Ebrima"/>
               </a:rPr>
-              <a:t>የዝማሬ ቃል ሁሉም አንሶሃል (2x)</a:t>
+              <a:t>የዝማሬ ቃል ሁሉም አንሶሃል 2x</a:t>
             </a:r>
           </a:p>
         </p:txBody>
@@ -4365,7 +4365,7 @@
                 <a:ea typeface="Ebrima"/>
                 <a:cs typeface="Ebrima"/>
               </a:rPr>
-              <a:t>አንተን ማምለኪያ (2x)</a:t>
+              <a:t>አንተን ማምለኪያ 2x</a:t>
             </a:r>
           </a:p>
           <a:p>
@@ -4401,7 +4401,7 @@
                 <a:ea typeface="Ebrima"/>
                 <a:cs typeface="Ebrima"/>
               </a:rPr>
-              <a:t>እድሜ ልክም ያንልሳል ዘላለምም ያንሳል (2x)</a:t>
+              <a:t>እድሜ ልክም ያንልሳል ዘላለምም ያንሳል 2x</a:t>
             </a:r>
           </a:p>
         </p:txBody>
@@ -4486,7 +4486,7 @@
                 <a:ea typeface="Ebrima"/>
                 <a:cs typeface="Ebrima"/>
               </a:rPr>
-              <a:t>ያንሳል ብዬ አላቆምም (2x)</a:t>
+              <a:t>ያንሳል ብዬ አላቆምም 2x</a:t>
             </a:r>
           </a:p>
         </p:txBody>
@@ -4571,7 +4571,7 @@
                 <a:ea typeface="Ebrima"/>
                 <a:cs typeface="Ebrima"/>
               </a:rPr>
-              <a:t>አገባለሁ ምስጋናው መሃል (2x)</a:t>
+              <a:t>አገባለሁ ምስጋናው መሃል 2x</a:t>
             </a:r>
           </a:p>
           <a:p>
